--- a/decks/maths-sequences/maths-sequences_ch1_what-is-a-sequence.pptx
+++ b/decks/maths-sequences/maths-sequences_ch1_what-is-a-sequence.pptx
@@ -123,29 +123,29 @@
   <p:extLst>
     <p:ext uri="{521415D9-36F7-43E2-AB2F-B90AF26B5E84}">
       <p14:sectionLst xmlns:p14="http://schemas.microsoft.com/office/powerpoint/2010/main">
-        <p14:section name="Opening" id="{03cfab5a-15a3-6b48-9132-60b5ac6cb5c6}">
+        <p14:section name="Opening" id="{65b96d75-6252-1771-cf31-dadeb0626c83}">
           <p14:sldIdLst>
             <p14:sldId id="256"/>
           </p14:sldIdLst>
         </p14:section>
-        <p14:section name="Gate" id="{0f85f746-a09e-ba46-7a95-a9be92a8263c}">
+        <p14:section name="Gate" id="{73078930-d59a-213c-2615-8507eb842b9f}">
           <p14:sldIdLst>
             <p14:sldId id="257"/>
             <p14:sldId id="258"/>
           </p14:sldIdLst>
         </p14:section>
-        <p14:section name="Pre-teach" id="{5561a78c-2e34-2d12-9af3-b52b6600a76a}">
+        <p14:section name="Pre-teach" id="{28dce702-8af4-68bb-6411-6bd26cef460a}">
           <p14:sldIdLst>
             <p14:sldId id="259"/>
           </p14:sldIdLst>
         </p14:section>
-        <p14:section name="Read-along" id="{f4227122-6e9b-bf52-70ee-108365ae2c27}">
+        <p14:section name="Read-along" id="{72e361bd-bcd8-d9b3-6787-872c478249ed}">
           <p14:sldIdLst>
             <p14:sldId id="260"/>
             <p14:sldId id="261"/>
           </p14:sldIdLst>
         </p14:section>
-        <p14:section name="Teach" id="{323dad73-d3b3-53a5-f83b-08642e8c3095}">
+        <p14:section name="Teach" id="{24af8582-b62b-605e-84c3-f3568380cc1f}">
           <p14:sldIdLst>
             <p14:sldId id="262"/>
             <p14:sldId id="263"/>
@@ -154,18 +154,18 @@
             <p14:sldId id="266"/>
           </p14:sldIdLst>
         </p14:section>
-        <p14:section name="Routes" id="{f87207ac-4551-dce8-4864-0b06696b69c6}">
+        <p14:section name="Routes" id="{773551f1-c7e8-5a2e-748c-558a0e5b7dce}">
           <p14:sldIdLst>
             <p14:sldId id="267"/>
             <p14:sldId id="268"/>
           </p14:sldIdLst>
         </p14:section>
-        <p14:section name="Close" id="{db312506-3445-d16a-23d4-a38b65779857}">
+        <p14:section name="Close" id="{57604bce-0df5-74ee-aaa7-a54d23e179d9}">
           <p14:sldIdLst>
             <p14:sldId id="269"/>
           </p14:sldIdLst>
         </p14:section>
-        <p14:section name="Answers" id="{db6b7fce-fc85-feff-a6fb-073d4de6a2c3}">
+        <p14:section name="Answers" id="{833dda3c-1380-a414-8921-0f437aacdee2}">
           <p14:sldIdLst>
             <p14:sldId id="270"/>
             <p14:sldId id="271"/>
@@ -1043,7 +1043,7 @@
               <a:rPr lang="en-US" dirty="0"/>
               <a:t>Exit ticket — individual, silent, on a slip or mini-whiteboard. Recall before help: no notes, no lanes, no hints. Collect before pupils leave.
 Question: A pattern of squares has 20, 17 and 14 squares in its first three terms. How many squares are in the 6th term?
-Answer: B   5. Each term has 3 fewer squares than the one before. 14 is the 3rd term, so the 4th is 11, the 5th is 8 and the 6th is 5.
+Answer: C   5. Each term has 3 fewer squares than the one before. 14 is the 3rd term, so the 4th is 11, the 5th is 8 and the 6th is 5.
 Source of this question: module 3 task ("Predict and check") from the manifest.
 Sort the slips: correct → ready to move on; incorrect → start next lesson in the pre-teach group, with the read-along and the Support lane. Same destination next time.</a:t>
             </a:r>
@@ -1316,7 +1316,7 @@
             <a:r>
               <a:rPr lang="en-US" dirty="0"/>
               <a:t>Answers — exit ticket: Exit ticket. Reveal the answer; pupils mark their own work in a different colour, then read the "why" together. Same destination for every lane, so one answer serves the whole class.
-Answer: B   5
+Answer: C   5
 Why: Each term has 3 fewer squares than the one before. 14 is the 3rd term, so the 4th is 11, the 5th is 8 and the 6th is 5.
 Ask a Support pupil to explain one step, and a Stretch pupil to share their extension.</a:t>
             </a:r>
@@ -7614,7 +7614,7 @@
                 <a:ea typeface="Calibri" pitchFamily="34" charset="-122"/>
                 <a:cs typeface="Calibri" pitchFamily="34" charset="-120"/>
               </a:rPr>
-              <a:t>5</a:t>
+              <a:t>2</a:t>
             </a:r>
             <a:endParaRPr lang="en-US" sz="2400" dirty="0"/>
           </a:p>
@@ -7651,7 +7651,7 @@
                 <a:ea typeface="Calibri" pitchFamily="34" charset="-122"/>
                 <a:cs typeface="Calibri" pitchFamily="34" charset="-120"/>
               </a:rPr>
-              <a:t>2</a:t>
+              <a:t>5</a:t>
             </a:r>
             <a:endParaRPr lang="en-US" sz="2400" dirty="0"/>
           </a:p>
@@ -9011,7 +9011,7 @@
                 <a:ea typeface="Cambria" pitchFamily="34" charset="-122"/>
                 <a:cs typeface="Cambria" pitchFamily="34" charset="-120"/>
               </a:rPr>
-              <a:t>B   5</a:t>
+              <a:t>C   5</a:t>
             </a:r>
             <a:endParaRPr lang="en-US" sz="1800" dirty="0"/>
           </a:p>
@@ -9545,7 +9545,7 @@
                 <a:ea typeface="Calibri" pitchFamily="34" charset="-122"/>
                 <a:cs typeface="Calibri" pitchFamily="34" charset="-120"/>
               </a:rPr>
-              <a:t>15</a:t>
+              <a:t>18</a:t>
             </a:r>
             <a:endParaRPr lang="en-US" sz="2400" dirty="0"/>
           </a:p>
@@ -9656,7 +9656,7 @@
                 <a:ea typeface="Calibri" pitchFamily="34" charset="-122"/>
                 <a:cs typeface="Calibri" pitchFamily="34" charset="-120"/>
               </a:rPr>
-              <a:t>18</a:t>
+              <a:t>15</a:t>
             </a:r>
             <a:endParaRPr lang="en-US" sz="2400" dirty="0"/>
           </a:p>

--- a/decks/maths-sequences/maths-sequences_ch1_what-is-a-sequence.pptx
+++ b/decks/maths-sequences/maths-sequences_ch1_what-is-a-sequence.pptx
@@ -123,29 +123,29 @@
   <p:extLst>
     <p:ext uri="{521415D9-36F7-43E2-AB2F-B90AF26B5E84}">
       <p14:sectionLst xmlns:p14="http://schemas.microsoft.com/office/powerpoint/2010/main">
-        <p14:section name="Opening" id="{65b96d75-6252-1771-cf31-dadeb0626c83}">
+        <p14:section name="Opening" id="{7fee3038-fb00-e74a-28e0-4d98d09cd664}">
           <p14:sldIdLst>
             <p14:sldId id="256"/>
           </p14:sldIdLst>
         </p14:section>
-        <p14:section name="Gate" id="{73078930-d59a-213c-2615-8507eb842b9f}">
+        <p14:section name="Gate" id="{895c8f06-6d84-5038-df96-14f060bfe1ad}">
           <p14:sldIdLst>
             <p14:sldId id="257"/>
             <p14:sldId id="258"/>
           </p14:sldIdLst>
         </p14:section>
-        <p14:section name="Pre-teach" id="{28dce702-8af4-68bb-6411-6bd26cef460a}">
+        <p14:section name="Pre-teach" id="{d6cb1c7f-4d36-6b16-a8bd-a31b65bfcc6c}">
           <p14:sldIdLst>
             <p14:sldId id="259"/>
           </p14:sldIdLst>
         </p14:section>
-        <p14:section name="Read-along" id="{72e361bd-bcd8-d9b3-6787-872c478249ed}">
+        <p14:section name="Read-along" id="{af338895-105e-73e9-8c5c-ebb4f06a9fad}">
           <p14:sldIdLst>
             <p14:sldId id="260"/>
             <p14:sldId id="261"/>
           </p14:sldIdLst>
         </p14:section>
-        <p14:section name="Teach" id="{24af8582-b62b-605e-84c3-f3568380cc1f}">
+        <p14:section name="Teach" id="{7cbfedf2-7515-4b6c-1e22-6cade7f13675}">
           <p14:sldIdLst>
             <p14:sldId id="262"/>
             <p14:sldId id="263"/>
@@ -154,18 +154,18 @@
             <p14:sldId id="266"/>
           </p14:sldIdLst>
         </p14:section>
-        <p14:section name="Routes" id="{773551f1-c7e8-5a2e-748c-558a0e5b7dce}">
+        <p14:section name="Routes" id="{909b6fd5-853b-c3ef-58c3-4b2fcd3adc39}">
           <p14:sldIdLst>
             <p14:sldId id="267"/>
             <p14:sldId id="268"/>
           </p14:sldIdLst>
         </p14:section>
-        <p14:section name="Close" id="{57604bce-0df5-74ee-aaa7-a54d23e179d9}">
+        <p14:section name="Close" id="{90d78a9a-4f76-8122-2480-b0bcdf27c416}">
           <p14:sldIdLst>
             <p14:sldId id="269"/>
           </p14:sldIdLst>
         </p14:section>
-        <p14:section name="Answers" id="{833dda3c-1380-a414-8921-0f437aacdee2}">
+        <p14:section name="Answers" id="{6e98d2d3-0b65-1621-e668-60efc42ba36b}">
           <p14:sldIdLst>
             <p14:sldId id="270"/>
             <p14:sldId id="271"/>
